--- a/doc/assets/presentations/why-teamtalk.pptx
+++ b/doc/assets/presentations/why-teamtalk.pptx
@@ -2,24 +2,24 @@
 <file path=ppt/presentation.xml><?xml version="1.0" encoding="utf-8"?>
 <p:presentation xmlns:p="http://schemas.openxmlformats.org/presentationml/2006/main">
   <p:sldMasterIdLst>
-    <p:sldMasterId xmlns:r="http://schemas.openxmlformats.org/officeDocument/2006/relationships" id="2147483648" r:id="R09b7d6724030445e"/>
+    <p:sldMasterId xmlns:r="http://schemas.openxmlformats.org/officeDocument/2006/relationships" id="2147483648" r:id="Rb21bcf749e53445a"/>
   </p:sldMasterIdLst>
   <p:notesMasterIdLst>
-    <p:notesMasterId xmlns:r="http://schemas.openxmlformats.org/officeDocument/2006/relationships" r:id="Ra26d7975f2754176"/>
+    <p:notesMasterId xmlns:r="http://schemas.openxmlformats.org/officeDocument/2006/relationships" r:id="R52ad3832b9de454b"/>
   </p:notesMasterIdLst>
   <p:sldIdLst>
-    <p:sldId xmlns:r="http://schemas.openxmlformats.org/officeDocument/2006/relationships" id="256" r:id="R275eaaeaa9ee44ee"/>
-    <p:sldId xmlns:r="http://schemas.openxmlformats.org/officeDocument/2006/relationships" id="257" r:id="R1713d7cb91c9495d"/>
-    <p:sldId xmlns:r="http://schemas.openxmlformats.org/officeDocument/2006/relationships" id="258" r:id="R98c29416d14f4f18"/>
-    <p:sldId xmlns:r="http://schemas.openxmlformats.org/officeDocument/2006/relationships" id="259" r:id="Rf259d0ae4381426a"/>
-    <p:sldId xmlns:r="http://schemas.openxmlformats.org/officeDocument/2006/relationships" id="260" r:id="R50e28099d58943f1"/>
-    <p:sldId xmlns:r="http://schemas.openxmlformats.org/officeDocument/2006/relationships" id="261" r:id="Ra591d9c23f6d4fe4"/>
-    <p:sldId xmlns:r="http://schemas.openxmlformats.org/officeDocument/2006/relationships" id="262" r:id="R01a392d1f3da4674"/>
-    <p:sldId xmlns:r="http://schemas.openxmlformats.org/officeDocument/2006/relationships" id="263" r:id="Re4b9182bab4e4bc4"/>
-    <p:sldId xmlns:r="http://schemas.openxmlformats.org/officeDocument/2006/relationships" id="264" r:id="Rca26796ccaba4ac7"/>
-    <p:sldId xmlns:r="http://schemas.openxmlformats.org/officeDocument/2006/relationships" id="265" r:id="R11c3bedba5e14ce3"/>
-    <p:sldId xmlns:r="http://schemas.openxmlformats.org/officeDocument/2006/relationships" id="266" r:id="R401476e591404e25"/>
-    <p:sldId xmlns:r="http://schemas.openxmlformats.org/officeDocument/2006/relationships" id="267" r:id="R4a7dd7ba54c340e4"/>
+    <p:sldId xmlns:r="http://schemas.openxmlformats.org/officeDocument/2006/relationships" id="256" r:id="R5129924a94214a0d"/>
+    <p:sldId xmlns:r="http://schemas.openxmlformats.org/officeDocument/2006/relationships" id="257" r:id="R5db706a6123c4728"/>
+    <p:sldId xmlns:r="http://schemas.openxmlformats.org/officeDocument/2006/relationships" id="258" r:id="R7cb4c08f7533457a"/>
+    <p:sldId xmlns:r="http://schemas.openxmlformats.org/officeDocument/2006/relationships" id="259" r:id="R3832efbb779b48f0"/>
+    <p:sldId xmlns:r="http://schemas.openxmlformats.org/officeDocument/2006/relationships" id="260" r:id="Ra75c5f20ff1d4dad"/>
+    <p:sldId xmlns:r="http://schemas.openxmlformats.org/officeDocument/2006/relationships" id="261" r:id="R2b5aed2b3573466b"/>
+    <p:sldId xmlns:r="http://schemas.openxmlformats.org/officeDocument/2006/relationships" id="262" r:id="Rb61021adfe534512"/>
+    <p:sldId xmlns:r="http://schemas.openxmlformats.org/officeDocument/2006/relationships" id="263" r:id="R3116620580744296"/>
+    <p:sldId xmlns:r="http://schemas.openxmlformats.org/officeDocument/2006/relationships" id="264" r:id="R4bfa7cdeac91458d"/>
+    <p:sldId xmlns:r="http://schemas.openxmlformats.org/officeDocument/2006/relationships" id="265" r:id="Rabd6ba4c30d84f3a"/>
+    <p:sldId xmlns:r="http://schemas.openxmlformats.org/officeDocument/2006/relationships" id="266" r:id="R5299ed29a7e642a9"/>
+    <p:sldId xmlns:r="http://schemas.openxmlformats.org/officeDocument/2006/relationships" id="267" r:id="Rcd51c250fc7c4d85"/>
   </p:sldIdLst>
   <p:sldSz cx="12192000" cy="6858000"/>
   <p:notesSz cx="6858000" cy="9144000"/>
@@ -488,7 +488,7 @@
           </a:p>
           <a:p xmlns:a="http://schemas.openxmlformats.org/drawingml/2006/main">
             <a:r>
-              <a:t>开场不要比较菜单数量。核心命题是：通用 SaaS 与重型专属工程之间，是否能出现一套标准化、完全开源、可长期接手的第三路径。TeamTalk 尚未正式发布，本页表达的是产品定位。</a:t>
+              <a:t>开场不要比较菜单数量。核心命题是：通用 SaaS 与重型专属工程之间，是否能出现一套标准化、完全开源、可长期接手的第三路径。TeamTalk 当前为 0.0.1 开发者预览，本页说明产品定位。</a:t>
             </a:r>
           </a:p>
         </p:txBody>
@@ -1438,7 +1438,7 @@
           </a:p>
           <a:p xmlns:a="http://schemas.openxmlformats.org/drawingml/2006/main">
             <a:r>
-              <a:t>这是第一张技术页，但仍用业务能力表达。当前 IM 主链、组织、搜索、富媒体、Desktop/Android、无头 SDK 与私有部署均有实现；管理后台、办公套件广度、Windows/Linux 同等级验收和生产发布制度尚不成熟。</a:t>
+              <a:t>当前 IM 主链、组织目录、消息搜索、富媒体、Desktop/Android、无头 SDK 与私有部署可用。0.0.1 开发者预览具备版本化发行流程和冻结协议基线。完整备份恢复、管理后台治理及办公套件广度仍需补齐。Linux、Apple Silicon 媒体以及未覆盖的 DPI/多屏组合按实际交付范围验收。</a:t>
             </a:r>
           </a:p>
         </p:txBody>
@@ -1721,7 +1721,7 @@
   </p:cSld>
   <p:clrMap bg1="lt1" tx1="dk1" bg2="lt2" tx2="dk2" accent1="accent1" accent2="accent2" accent3="accent3" accent4="accent4" accent5="accent5" accent6="accent6" hlink="hlink" folHlink="folHlink"/>
   <p:sldLayoutIdLst>
-    <p:sldLayoutId xmlns:r="http://schemas.openxmlformats.org/officeDocument/2006/relationships" id="2147483649" r:id="Rfc893c4f7f194cda"/>
+    <p:sldLayoutId xmlns:r="http://schemas.openxmlformats.org/officeDocument/2006/relationships" id="2147483649" r:id="R6f920e0069e3427c"/>
   </p:sldLayoutIdLst>
   <p:txStyles>
     <p:titleStyle>
@@ -6649,7 +6649,7 @@
                 <a:ea typeface="PingFang SC"/>
                 <a:cs typeface="PingFang SC"/>
               </a:rPr>
-              <a:t>尚未正式发布</a:t>
+              <a:t>0.0.1 开发者预览</a:t>
             </a:r>
           </a:p>
           <a:p xmlns:a="http://schemas.openxmlformats.org/drawingml/2006/main">
@@ -6678,7 +6678,7 @@
                 <a:ea typeface="PingFang SC"/>
                 <a:cs typeface="PingFang SC"/>
               </a:rPr>
-              <a:t>迁移 / 备份待补齐</a:t>
+              <a:t>备份恢复待补齐</a:t>
             </a:r>
           </a:p>
           <a:p xmlns:a="http://schemas.openxmlformats.org/drawingml/2006/main">
@@ -13839,7 +13839,7 @@
                 <a:ea typeface="PingFang SC"/>
                 <a:cs typeface="PingFang SC"/>
               </a:rPr>
-              <a:t>当前基础足以进入受控 POC；任务、日历、会议、完整 AI 平台和正式发布基线仍待建设。</a:t>
+              <a:t>0.0.1 开发者预览已有发行基线。备份恢复、任务、日历、会议与完整 AI 平台仍待建设。</a:t>
             </a:r>
           </a:p>
         </p:txBody>
@@ -13898,7 +13898,7 @@
                 <a:ea typeface="PingFang SC"/>
                 <a:cs typeface="PingFang SC"/>
               </a:rPr>
-              <a:t>来源：TeamTalk 产品、架构与测试文档；核对于 2026-09-02</a:t>
+              <a:t>来源：TeamTalk 产品、架构与测试文档</a:t>
             </a:r>
           </a:p>
         </p:txBody>
